--- a/drafts/Exos_JP_3min_InvestorPitch_IDJ_BRANDED_v6_2026-09-27.pptx
+++ b/drafts/Exos_JP_3min_InvestorPitch_IDJ_BRANDED_v6_2026-09-27.pptx
@@ -7744,7 +7744,7 @@
                 </a:solidFill>
                 <a:latin typeface="Arial"/>
               </a:rPr>
-              <a:t>Roll into an Exos U.S. liquidity event: Series A close (raising now), public listing, or acquisition. Horizon ~3+ yrs.</a:t>
+              <a:t>Liquidity paths: acquisition of the K.K. stake by Exos U.S. or a strategic buyer, or a K.K.-level listing. Horizon ~3+ yrs.</a:t>
             </a:r>
           </a:p>
         </p:txBody>
@@ -8168,6 +8168,51 @@
                 <a:latin typeface="Arial"/>
               </a:rPr>
               <a:t>Staged equity rounds — realistic financing</a:t>
+            </a:r>
+          </a:p>
+        </p:txBody>
+      </p:sp>
+      <p:sp>
+        <p:nvSpPr>
+          <p:cNvPr id="46" name="TextBox 45"/>
+          <p:cNvSpPr txBox="1"/>
+          <p:nvPr/>
+        </p:nvSpPr>
+        <p:spPr>
+          <a:xfrm>
+            <a:off x="603504" y="6272784"/>
+            <a:ext cx="10972800" cy="274320"/>
+          </a:xfrm>
+          <a:prstGeom prst="rect">
+            <a:avLst/>
+          </a:prstGeom>
+          <a:noFill/>
+        </p:spPr>
+        <p:txBody>
+          <a:bodyPr wrap="square" anchor="t" lIns="0" rIns="0" tIns="0" bIns="0">
+            <a:spAutoFit/>
+          </a:bodyPr>
+          <a:lstStyle/>
+          <a:p>
+            <a:pPr algn="l">
+              <a:lnSpc>
+                <a:spcPct val="100000"/>
+              </a:lnSpc>
+              <a:spcBef>
+                <a:spcPts val="0"/>
+              </a:spcBef>
+              <a:spcAft>
+                <a:spcPts val="0"/>
+              </a:spcAft>
+            </a:pPr>
+            <a:r>
+              <a:rPr sz="850" b="0">
+                <a:solidFill>
+                  <a:srgbClr val="9A9AA1"/>
+                </a:solidFill>
+                <a:latin typeface="Arial"/>
+              </a:rPr>
+              <a:t>Not an offer of securities of Exos Aerospace Systems &amp; Technologies, Inc. Any offering by Exos Aerospace Japan K.K. will be made only through definitive documents to eligible investors.</a:t>
             </a:r>
           </a:p>
         </p:txBody>
@@ -9195,7 +9240,7 @@
                 </a:solidFill>
                 <a:latin typeface="Arial"/>
               </a:rPr>
-              <a:t>Seeking Japanese technical partners for licensed production of TRL-9 Type-5 tanks in Japan. BLK3-for-Japan production commences upon international approvals (incl. U.S. export).</a:t>
+              <a:t>Seeking Japanese technical partners for licensed production of TRL-9 Type-5 tanks in Japan. BLK3-for-Japan production commences upon international approvals (incl. U.S. export), with potential reallocation of U.S. BLK3 assets to match the speed of those approvals.</a:t>
             </a:r>
           </a:p>
         </p:txBody>

--- a/drafts/Exos_JP_3min_InvestorPitch_IDJ_BRANDED_v6_2026-09-27.pptx
+++ b/drafts/Exos_JP_3min_InvestorPitch_IDJ_BRANDED_v6_2026-09-27.pptx
@@ -6505,7 +6505,7 @@
                 </a:solidFill>
                 <a:latin typeface="Arial"/>
               </a:rPr>
-              <a:t>SEED ROUND — INTO THE K.K.</a:t>
+              <a:t>JAPAN ROUND — VIA EXOS U.S.</a:t>
             </a:r>
           </a:p>
         </p:txBody>
@@ -6640,7 +6640,7 @@
                 </a:solidFill>
                 <a:latin typeface="Arial"/>
               </a:rPr>
-              <a:t>Capital goes into the Japan entity — the U.S. parent keeps majority + control.</a:t>
+              <a:t>Invest through the Exos U.S. offering vehicle; proceeds fund the Japan K.K. build-out.</a:t>
             </a:r>
           </a:p>
           <a:p>
@@ -6662,7 +6662,7 @@
                 </a:solidFill>
                 <a:latin typeface="Arial"/>
               </a:rPr>
-              <a:t>Clean for both Japan FDI (FEFTA) and U.S. (CFIUS).</a:t>
+              <a:t>Exos Aerospace Japan K.K. is a wholly-owned subsidiary of Exos U.S.</a:t>
             </a:r>
           </a:p>
         </p:txBody>
@@ -7251,7 +7251,7 @@
                 </a:solidFill>
                 <a:latin typeface="Arial"/>
               </a:rPr>
-              <a:t>SEED (now)</a:t>
+              <a:t>ROUND (now)</a:t>
             </a:r>
           </a:p>
         </p:txBody>
@@ -7744,7 +7744,7 @@
                 </a:solidFill>
                 <a:latin typeface="Arial"/>
               </a:rPr>
-              <a:t>Liquidity paths: acquisition of the K.K. stake by Exos U.S. or a strategic buyer, or a K.K.-level listing. Horizon ~3+ yrs.</a:t>
+              <a:t>Liquidity through an Exos U.S. event: public listing or acquisition. Horizon ~3+ yrs.</a:t>
             </a:r>
           </a:p>
         </p:txBody>
@@ -8212,7 +8212,7 @@
                 </a:solidFill>
                 <a:latin typeface="Arial"/>
               </a:rPr>
-              <a:t>Not an offer of securities of Exos Aerospace Systems &amp; Technologies, Inc. Any offering by Exos Aerospace Japan K.K. will be made only through definitive documents to eligible investors.</a:t>
+              <a:t>This presentation is not an offer to sell or a solicitation of an offer to buy securities. Any offering will be made only through definitive offering documents to eligible investors.</a:t>
             </a:r>
           </a:p>
         </p:txBody>

--- a/drafts/Exos_JP_3min_InvestorPitch_IDJ_BRANDED_v6_2026-09-27.pptx
+++ b/drafts/Exos_JP_3min_InvestorPitch_IDJ_BRANDED_v6_2026-09-27.pptx
@@ -6505,7 +6505,7 @@
                 </a:solidFill>
                 <a:latin typeface="Arial"/>
               </a:rPr>
-              <a:t>JAPAN ROUND — VIA EXOS U.S.</a:t>
+              <a:t>JAPAN ROUND — REG S, VIA EAI LLC</a:t>
             </a:r>
           </a:p>
         </p:txBody>
@@ -6640,7 +6640,7 @@
                 </a:solidFill>
                 <a:latin typeface="Arial"/>
               </a:rPr>
-              <a:t>Invest through the Exos U.S. offering vehicle; proceeds fund the Japan K.K. build-out.</a:t>
+              <a:t>Purchase units in Exos Aerospace Investments, LLC (EAI), which holds Exos U.S. equity; proceeds fund the wholly-owned Japan K.K.</a:t>
             </a:r>
           </a:p>
           <a:p>
@@ -6662,7 +6662,7 @@
                 </a:solidFill>
                 <a:latin typeface="Arial"/>
               </a:rPr>
-              <a:t>Exos Aerospace Japan K.K. is a wholly-owned subsidiary of Exos U.S.</a:t>
+              <a:t>Offshore Regulation S offering — separate from the Exos U.S. domestic offering.</a:t>
             </a:r>
           </a:p>
         </p:txBody>
@@ -7744,7 +7744,7 @@
                 </a:solidFill>
                 <a:latin typeface="Arial"/>
               </a:rPr>
-              <a:t>Liquidity through an Exos U.S. event: public listing or acquisition. Horizon ~3+ yrs.</a:t>
+              <a:t>Liquidity through an Exos U.S. event (public listing or acquisition), realized via EAI LLC. Horizon ~3+ yrs.</a:t>
             </a:r>
           </a:p>
         </p:txBody>
@@ -8180,8 +8180,8 @@
         </p:nvSpPr>
         <p:spPr>
           <a:xfrm>
-            <a:off x="603504" y="6272784"/>
-            <a:ext cx="10972800" cy="274320"/>
+            <a:off x="603504" y="6144768"/>
+            <a:ext cx="10972800" cy="411480"/>
           </a:xfrm>
           <a:prstGeom prst="rect">
             <a:avLst/>
@@ -8212,7 +8212,7 @@
                 </a:solidFill>
                 <a:latin typeface="Arial"/>
               </a:rPr>
-              <a:t>This presentation is not an offer to sell or a solicitation of an offer to buy securities. Any offering will be made only through definitive offering documents to eligible investors.</a:t>
+              <a:t>Not an offer to sell or a solicitation of an offer to buy securities. Units of Exos Aerospace Investments, LLC are offered only to non-U.S. persons in offshore transactions under Regulation S, separate from any U.S. offering, and only through definitive offering documents. Not registered under the U.S. Securities Act; may not be offered or sold in the U.S. or to U.S. persons absent registration or an exemption.</a:t>
             </a:r>
           </a:p>
         </p:txBody>

--- a/drafts/Exos_JP_3min_InvestorPitch_IDJ_BRANDED_v6_2026-09-27.pptx
+++ b/drafts/Exos_JP_3min_InvestorPitch_IDJ_BRANDED_v6_2026-09-27.pptx
@@ -6640,7 +6640,7 @@
                 </a:solidFill>
                 <a:latin typeface="Arial"/>
               </a:rPr>
-              <a:t>Purchase units in Exos Aerospace Investments, LLC (EAI), which holds Exos U.S. equity; proceeds fund the wholly-owned Japan K.K.</a:t>
+              <a:t>Purchase units in Exos Aerospace Investments, LLC (EAI); EAI units mirror Exos U.S. shares, and proceeds fund the wholly-owned Japan K.K.</a:t>
             </a:r>
           </a:p>
           <a:p>
